--- a/docs/presentaciones/parts/parte-5-ingenieria-de-datos-completa.pptx
+++ b/docs/presentaciones/parts/parte-5-ingenieria-de-datos-completa.pptx
@@ -5110,7 +5110,7 @@
                 </a:solidFill>
                 <a:latin typeface="Segoe UI"/>
               </a:rPr>
-              <a:t>Parte: 5 — Ingeniería de Datos · Fuente: Chambers &amp; Zaharia Spark: The Definitive Guide (O'Reilly, 2018) + PySpark docs 3.5+.  Duración estimada: 90 min.</a:t>
+              <a:t>Parte: 5 — Ingeniería de Datos · Fuente: Chambers &amp; Zaharia Spark: The Definitive Guide (O'Reilly, 2018) + PySpark docs 3.5+.  Duración estimada: 90 min. · Nivel: Intermedio-Avanzado</a:t>
             </a:r>
           </a:p>
         </p:txBody>
@@ -6062,7 +6062,7 @@
                 </a:solidFill>
                 <a:latin typeface="Segoe UI"/>
               </a:rPr>
-              <a:t>Requiere: pip install pyspark==3.5.3. Usaremos modo local con todos los cores.</a:t>
+              <a:t>PySpark es "pandas que corre repartido en muchas máquinas". Escribís código casi idéntico al de pandas (df.filter(...).groupBy(...).agg(...)), pero por debajo Spark parte el dataset en trozos, los reparte entre varios workers y procesa cada trozo en</a:t>
             </a:r>
           </a:p>
         </p:txBody>
@@ -7429,7 +7429,7 @@
                 </a:solidFill>
                 <a:latin typeface="Segoe UI"/>
               </a:rPr>
-              <a:t>Parte: 5 — Ingeniería de Datos · Fuente: docs Polars + Polars vs pandas benchmark.  Duración estimada: 75 min. · Esta clase es complementaria a la Clase 008 (Polars básico, Parte 0). Acá el foco es producción: lazy API, streaming engine, Arrow zero-copy, integración con DuckDB/Parquet.</a:t>
+              <a:t>Parte: 5 — Ingeniería de Datos · Fuente: docs Polars + Polars vs pandas benchmark.  Duración estimada: 75 min. · Nivel: Intermedio-Avanzado · Esta clase es complementaria a la Clase 008 (Polars básico, Parte 0). Acá el foco es producción: lazy API, streaming engine, Arrow zero-copy, integración con DuckDB/Parquet.</a:t>
             </a:r>
           </a:p>
         </p:txBody>
@@ -9960,7 +9960,7 @@
                 </a:solidFill>
                 <a:latin typeface="Segoe UI"/>
               </a:rPr>
-              <a:t>Parte: 5 — Ingeniería de Datos · Fuente: Reis &amp; Housley Fundamentals of Data Engineering (O'Reilly, 2022) cap. 6 + 9 + docs oficiales.  Duración estimada: 80 min.</a:t>
+              <a:t>Parte: 5 — Ingeniería de Datos · Fuente: Reis &amp; Housley Fundamentals of Data Engineering (O'Reilly, 2022) cap. 6 + 9 + docs oficiales.  Duración estimada: 80 min. · Nivel: Intermedio-Avanzado</a:t>
             </a:r>
           </a:p>
         </p:txBody>
@@ -12070,7 +12070,7 @@
                 </a:solidFill>
                 <a:latin typeface="Segoe UI"/>
               </a:rPr>
-              <a:t>Parte: 5 — Ingeniería de Datos · Fuente: Kreps, Building a Real-Time Data Pipeline + Narkhede, Shapira, Palino Kafka: The Definitive Guide (O'Reilly, 2ª ed., 2021) + Reis &amp; Housley cap. 7.  Duración estimada: 85 min.</a:t>
+              <a:t>Parte: 5 — Ingeniería de Datos · Fuente: Kreps, Building a Real-Time Data Pipeline + Narkhede, Shapira, Palino Kafka: The Definitive Guide (O'Reilly, 2ª ed., 2021) + Reis &amp; Housley cap. 7.  Duración estimada: 85 min. · Nivel: Intermedio-Avanzado</a:t>
             </a:r>
           </a:p>
         </p:txBody>
@@ -14639,7 +14639,7 @@
                 </a:solidFill>
                 <a:latin typeface="Segoe UI"/>
               </a:rPr>
-              <a:t>Parte: 5 — Ingeniería de Datos · Fuente: docs Parquet 2.x + Avro spec + Reis &amp; Housley cap. 6.  Duración estimada: 70 min.</a:t>
+              <a:t>Parte: 5 — Ingeniería de Datos · Fuente: docs Parquet 2.x + Avro spec + Reis &amp; Housley cap. 6.  Duración estimada: 70 min. · Nivel: Intermedio-Avanzado</a:t>
             </a:r>
           </a:p>
         </p:txBody>
@@ -17015,7 +17015,7 @@
                 </a:solidFill>
                 <a:latin typeface="Segoe UI"/>
               </a:rPr>
-              <a:t>Parte: 5 — Ingeniería de Datos · Fuente: Kimball &amp; Ross The Data Warehouse Toolkit (Wiley, 3ª ed.) + Reis &amp; Housley cap. 8.  Duración estimada: 75 min.</a:t>
+              <a:t>Parte: 5 — Ingeniería de Datos · Fuente: Kimball &amp; Ross The Data Warehouse Toolkit (Wiley, 3ª ed.) + Reis &amp; Housley cap. 8.  Duración estimada: 75 min. · Nivel: Intermedio-Avanzado</a:t>
             </a:r>
           </a:p>
         </p:txBody>
@@ -17567,7 +17567,7 @@
                 </a:solidFill>
                 <a:latin typeface="Segoe UI"/>
               </a:rPr>
-              <a:t>Parte: 5 — Ingeniería de Datos · Fuente: Reis &amp; Housley Fundamentals of Data Engineering (O'Reilly, 2022) cap. 8 + Airflow docs 2.10+.  Duración estimada: 80 min.</a:t>
+              <a:t>Parte: 5 — Ingeniería de Datos · Fuente: Reis &amp; Housley Fundamentals of Data Engineering (O'Reilly, 2022) cap. 8 + Airflow docs 2.10+.  Duración estimada: 80 min. · Nivel: Intermedio-Avanzado</a:t>
             </a:r>
           </a:p>
         </p:txBody>
@@ -21405,7 +21405,7 @@
                 </a:solidFill>
                 <a:latin typeface="Segoe UI"/>
               </a:rPr>
-              <a:t>Parte: 5 — Ingeniería de Datos · Fuente: Prefect 3 docs + Dagster docs + Reis &amp; Housley cap. 8.  Duración estimada: 75 min.</a:t>
+              <a:t>Parte: 5 — Ingeniería de Datos · Fuente: Prefect 3 docs + Dagster docs + Reis &amp; Housley cap. 8.  Duración estimada: 75 min. · Nivel: Intermedio-Avanzado</a:t>
             </a:r>
           </a:p>
         </p:txBody>
